--- a/Predictive analysis of video games sales.pptx
+++ b/Predictive analysis of video games sales.pptx
@@ -2689,7 +2689,7 @@
                 <a:latin typeface="Arial" panose="020B0604020202020204" pitchFamily="34" charset="0"/>
                 <a:cs typeface="Arial" panose="020B0604020202020204" pitchFamily="34" charset="0"/>
               </a:rPr>
-              <a:t>Presented By: Group 5</a:t>
+              <a:t>Presented By: Spartans</a:t>
             </a:r>
             <a:endParaRPr lang="en-US" sz="1700" dirty="0">
               <a:latin typeface="Arial" panose="020B0604020202020204" pitchFamily="34" charset="0"/>
